--- a/design/ppt/dist/ggc-presentation-template.pptx
+++ b/design/ppt/dist/ggc-presentation-template.pptx
@@ -4559,7 +4559,7 @@
           </a:prstGeom>
           <a:ln w="9525">
             <a:solidFill>
-              <a:srgbClr val="E6EBF1"/>
+              <a:srgbClr val="D5DCE5"/>
             </a:solidFill>
           </a:ln>
         </p:spPr>
@@ -5323,7 +5323,7 @@
           </a:prstGeom>
           <a:ln w="9525">
             <a:solidFill>
-              <a:srgbClr val="E6EBF1"/>
+              <a:srgbClr val="D5DCE5"/>
             </a:solidFill>
           </a:ln>
         </p:spPr>
@@ -5501,7 +5501,7 @@
           </a:solidFill>
           <a:ln w="9525">
             <a:solidFill>
-              <a:srgbClr val="E6EBF1"/>
+              <a:srgbClr val="D5DCE5"/>
             </a:solidFill>
           </a:ln>
           <a:effectLst/>
@@ -5701,7 +5701,7 @@
           </a:solidFill>
           <a:ln w="9525">
             <a:solidFill>
-              <a:srgbClr val="E6EBF1"/>
+              <a:srgbClr val="D5DCE5"/>
             </a:solidFill>
           </a:ln>
           <a:effectLst/>
@@ -5978,7 +5978,7 @@
           </a:prstGeom>
           <a:ln w="9525">
             <a:solidFill>
-              <a:srgbClr val="E6EBF1"/>
+              <a:srgbClr val="D5DCE5"/>
             </a:solidFill>
           </a:ln>
         </p:spPr>
@@ -6357,7 +6357,7 @@
           </a:prstGeom>
           <a:ln w="9525">
             <a:solidFill>
-              <a:srgbClr val="E6EBF1"/>
+              <a:srgbClr val="D5DCE5"/>
             </a:solidFill>
           </a:ln>
         </p:spPr>
@@ -6806,7 +6806,7 @@
                   </a:txBody>
                   <a:tcPr marL="109728" marR="109728">
                     <a:solidFill>
-                      <a:srgbClr val="EEF1F5"/>
+                      <a:srgbClr val="FFFFFF"/>
                     </a:solidFill>
                   </a:tcPr>
                 </a:tc>
@@ -6830,7 +6830,7 @@
                   </a:txBody>
                   <a:tcPr marL="109728" marR="109728">
                     <a:solidFill>
-                      <a:srgbClr val="EEF1F5"/>
+                      <a:srgbClr val="FFFFFF"/>
                     </a:solidFill>
                   </a:tcPr>
                 </a:tc>
@@ -6854,7 +6854,7 @@
                   </a:txBody>
                   <a:tcPr marL="109728" marR="109728">
                     <a:solidFill>
-                      <a:srgbClr val="EEF1F5"/>
+                      <a:srgbClr val="FFFFFF"/>
                     </a:solidFill>
                   </a:tcPr>
                 </a:tc>
@@ -6878,7 +6878,7 @@
                   </a:txBody>
                   <a:tcPr marL="109728" marR="109728">
                     <a:solidFill>
-                      <a:srgbClr val="EEF1F5"/>
+                      <a:srgbClr val="FFFFFF"/>
                     </a:solidFill>
                   </a:tcPr>
                 </a:tc>
@@ -6902,7 +6902,7 @@
                   </a:txBody>
                   <a:tcPr marL="109728" marR="109728">
                     <a:solidFill>
-                      <a:srgbClr val="EEF1F5"/>
+                      <a:srgbClr val="FFFFFF"/>
                     </a:solidFill>
                   </a:tcPr>
                 </a:tc>
@@ -7251,7 +7251,7 @@
           </a:prstGeom>
           <a:ln w="9525">
             <a:solidFill>
-              <a:srgbClr val="E6EBF1"/>
+              <a:srgbClr val="D5DCE5"/>
             </a:solidFill>
           </a:ln>
         </p:spPr>
@@ -7524,7 +7524,7 @@
           </a:prstGeom>
           <a:ln w="9525">
             <a:solidFill>
-              <a:srgbClr val="E6EBF1"/>
+              <a:srgbClr val="D5DCE5"/>
             </a:solidFill>
           </a:ln>
         </p:spPr>
@@ -7702,7 +7702,7 @@
           </a:solidFill>
           <a:ln w="9525">
             <a:solidFill>
-              <a:srgbClr val="E6EBF1"/>
+              <a:srgbClr val="D5DCE5"/>
             </a:solidFill>
           </a:ln>
           <a:effectLst/>
@@ -7871,7 +7871,7 @@
           </a:solidFill>
           <a:ln w="9525">
             <a:solidFill>
-              <a:srgbClr val="E6EBF1"/>
+              <a:srgbClr val="D5DCE5"/>
             </a:solidFill>
           </a:ln>
           <a:effectLst/>
@@ -8040,7 +8040,7 @@
           </a:solidFill>
           <a:ln w="9525">
             <a:solidFill>
-              <a:srgbClr val="E6EBF1"/>
+              <a:srgbClr val="D5DCE5"/>
             </a:solidFill>
           </a:ln>
           <a:effectLst/>
@@ -8209,7 +8209,7 @@
           </a:solidFill>
           <a:ln w="9525">
             <a:solidFill>
-              <a:srgbClr val="E6EBF1"/>
+              <a:srgbClr val="D5DCE5"/>
             </a:solidFill>
           </a:ln>
           <a:effectLst/>
@@ -8455,7 +8455,7 @@
           </a:prstGeom>
           <a:ln w="9525">
             <a:solidFill>
-              <a:srgbClr val="E6EBF1"/>
+              <a:srgbClr val="D5DCE5"/>
             </a:solidFill>
           </a:ln>
         </p:spPr>
